--- a/classes/parte-10-seguridad-en-la-nube-y-contenedores/229-kubernetes-hardening-y-ataques/clase-229-presentacion.pptx
+++ b/classes/parte-10-seguridad-en-la-nube-y-contenedores/229-kubernetes-hardening-y-ataques/clase-229-presentacion.pptx
@@ -17,6 +17,10 @@
     <p:sldId id="265" r:id="rId16"/>
     <p:sldId id="266" r:id="rId17"/>
     <p:sldId id="267" r:id="rId18"/>
+    <p:sldId id="268" r:id="rId19"/>
+    <p:sldId id="269" r:id="rId20"/>
+    <p:sldId id="270" r:id="rId21"/>
+    <p:sldId id="271" r:id="rId22"/>
   </p:sldIdLst>
   <p:sldSz cx="9144000" cy="6858000" type="screen4x3"/>
   <p:notesSz cx="6858000" cy="9144000"/>
@@ -3198,7 +3202,7 @@
                   <a:srgbClr val="0B3D2E"/>
                 </a:solidFill>
               </a:rPr>
-              <a:t>⚠️ Errores comunes</a:t>
+              <a:t>🧪 Laboratorio guiado</a:t>
             </a:r>
           </a:p>
         </p:txBody>
@@ -3236,67 +3240,97 @@
                   <a:srgbClr val="22282E"/>
                 </a:solidFill>
               </a:rPr>
-              <a:t>•  PSA no bloquea pods peligrosos — Namespace en modo privileged o solo warn; ponlo en enforce: restricted.</a:t>
-            </a:r>
-          </a:p>
-          <a:p>
-            <a:pPr>
-              <a:spcAft>
-                <a:spcPts val="600"/>
-              </a:spcAft>
-            </a:pPr>
-            <a:r>
-              <a:rPr sz="1500">
-                <a:solidFill>
-                  <a:srgbClr val="22282E"/>
-                </a:solidFill>
-              </a:rPr>
-              <a:t>•  NetworkPolicy "no hace nada" — El CNI no la soporta; usa Calico/Cilium y aplica default-deny primero.</a:t>
-            </a:r>
-          </a:p>
-          <a:p>
-            <a:pPr>
-              <a:spcAft>
-                <a:spcPts val="600"/>
-              </a:spcAft>
-            </a:pPr>
-            <a:r>
-              <a:rPr sz="1500">
-                <a:solidFill>
-                  <a:srgbClr val="22282E"/>
-                </a:solidFill>
-              </a:rPr>
-              <a:t>•  Pod no arranca tras hardening — runAsNonRoot sin usuario válido o ruta que exige escritura; ajusta UID y monta tmpfs.</a:t>
-            </a:r>
-          </a:p>
-          <a:p>
-            <a:pPr>
-              <a:spcAft>
-                <a:spcPts val="600"/>
-              </a:spcAft>
-            </a:pPr>
-            <a:r>
-              <a:rPr sz="1500">
-                <a:solidFill>
-                  <a:srgbClr val="22282E"/>
-                </a:solidFill>
-              </a:rPr>
-              <a:t>•  RBAC amplio "porque es más fácil" — Superficie de escalada enorme; refactoriza a Roles concretos por namespace.</a:t>
-            </a:r>
-          </a:p>
-          <a:p>
-            <a:pPr>
-              <a:spcAft>
-                <a:spcPts val="600"/>
-              </a:spcAft>
-            </a:pPr>
-            <a:r>
-              <a:rPr sz="1500">
-                <a:solidFill>
-                  <a:srgbClr val="22282E"/>
-                </a:solidFill>
-              </a:rPr>
-              <a:t>•  Token de SA robado da acceso total — SA con permisos excesivos y token automontado; recorta permisos y desactiva automount.</a:t>
+              <a:t>•  Ejecuta kube-bench y anota los hallazgos del plano de control y de los nodos.</a:t>
+            </a:r>
+          </a:p>
+          <a:p>
+            <a:pPr>
+              <a:spcAft>
+                <a:spcPts val="600"/>
+              </a:spcAft>
+            </a:pPr>
+            <a:r>
+              <a:rPr sz="1500">
+                <a:solidFill>
+                  <a:srgbClr val="22282E"/>
+                </a:solidFill>
+              </a:rPr>
+              <a:t>•  Ataque — pod privilegiado: despliega un pod con securityContext.privileged: true y hostPID: true; desde él, accede al filesystem del nodo (nsenter/chroot al host). Comprueba el escape.</a:t>
+            </a:r>
+          </a:p>
+          <a:p>
+            <a:pPr>
+              <a:spcAft>
+                <a:spcPts val="600"/>
+              </a:spcAft>
+            </a:pPr>
+            <a:r>
+              <a:rPr sz="1500">
+                <a:solidFill>
+                  <a:srgbClr val="22282E"/>
+                </a:solidFill>
+              </a:rPr>
+              <a:t>•  Mitigación: activa Pod Security Admission en modo restricted en el namespace y vuelve a intentar desplegar el pod privilegiado; confirma que el admission lo rechaza.</a:t>
+            </a:r>
+          </a:p>
+          <a:p>
+            <a:pPr>
+              <a:spcAft>
+                <a:spcPts val="600"/>
+              </a:spcAft>
+            </a:pPr>
+            <a:r>
+              <a:rPr sz="1500">
+                <a:solidFill>
+                  <a:srgbClr val="22282E"/>
+                </a:solidFill>
+              </a:rPr>
+              <a:t>•  Ataque — RBAC: crea un Role con create pods y demuestra cómo, montando un pod con un ServiceAccount potente, se escala a más permisos.</a:t>
+            </a:r>
+          </a:p>
+          <a:p>
+            <a:pPr>
+              <a:spcAft>
+                <a:spcPts val="600"/>
+              </a:spcAft>
+            </a:pPr>
+            <a:r>
+              <a:rPr sz="1500">
+                <a:solidFill>
+                  <a:srgbClr val="22282E"/>
+                </a:solidFill>
+              </a:rPr>
+              <a:t>•  Mitigación: aplica privilegio mínimo, elimina verbos escalate/bind innecesarios y usa automountServiceAccountToken: false donde no se requiera.</a:t>
+            </a:r>
+          </a:p>
+          <a:p>
+            <a:pPr>
+              <a:spcAft>
+                <a:spcPts val="600"/>
+              </a:spcAft>
+            </a:pPr>
+            <a:r>
+              <a:rPr sz="1500">
+                <a:solidFill>
+                  <a:srgbClr val="22282E"/>
+                </a:solidFill>
+              </a:rPr>
+              <a:t>•  Ataque — red: demuestra que un pod comprometido alcanza a otros pods. Aplica una NetworkPolicy default-deny y permite solo el tráfico necesario; verifica el aislamiento.</a:t>
+            </a:r>
+          </a:p>
+          <a:p>
+            <a:pPr>
+              <a:spcAft>
+                <a:spcPts val="600"/>
+              </a:spcAft>
+            </a:pPr>
+            <a:r>
+              <a:rPr sz="1500">
+                <a:solidFill>
+                  <a:srgbClr val="22282E"/>
+                </a:solidFill>
+              </a:rPr>
+              <a:t>•  Endurece cada Deployment con securityContext (runAsNonRoot, readOnlyRootFilesystem, drop ALL capabilities) y reejecuta kube-bench/kubeaudit para confirmar la mejora.</a:t>
             </a:r>
           </a:p>
         </p:txBody>
@@ -3347,7 +3381,7 @@
                   <a:srgbClr val="0B3D2E"/>
                 </a:solidFill>
               </a:rPr>
-              <a:t>❓ Preguntas frecuentes</a:t>
+              <a:t>✍️ Ejercicios</a:t>
             </a:r>
           </a:p>
         </p:txBody>
@@ -3385,82 +3419,82 @@
                   <a:srgbClr val="22282E"/>
                 </a:solidFill>
               </a:rPr>
-              <a:t>•  ❓ ¿Por qué desapareció PodSecurityPolicy y qué la reemplaza?</a:t>
-            </a:r>
-          </a:p>
-          <a:p>
-            <a:pPr>
-              <a:spcAft>
-                <a:spcPts val="600"/>
-              </a:spcAft>
-            </a:pPr>
-            <a:r>
-              <a:rPr sz="1500">
-                <a:solidFill>
-                  <a:srgbClr val="22282E"/>
-                </a:solidFill>
-              </a:rPr>
-              <a:t>•  Las PSP se eliminaron en Kubernetes 1.25 por ser complejas y confusas. Su reemplazo es Pod Security Admission (niveles baseline/restricted por namespace) o políticas con OPA Gatekeeper/Kyverno.</a:t>
-            </a:r>
-          </a:p>
-          <a:p>
-            <a:pPr>
-              <a:spcAft>
-                <a:spcPts val="600"/>
-              </a:spcAft>
-            </a:pPr>
-            <a:r>
-              <a:rPr sz="1500">
-                <a:solidFill>
-                  <a:srgbClr val="22282E"/>
-                </a:solidFill>
-              </a:rPr>
-              <a:t>•  ❓ ¿Un pod comprometido significa clúster comprometido?</a:t>
-            </a:r>
-          </a:p>
-          <a:p>
-            <a:pPr>
-              <a:spcAft>
-                <a:spcPts val="600"/>
-              </a:spcAft>
-            </a:pPr>
-            <a:r>
-              <a:rPr sz="1500">
-                <a:solidFill>
-                  <a:srgbClr val="22282E"/>
-                </a:solidFill>
-              </a:rPr>
-              <a:t>•  No necesariamente, pero puede escalar: si el pod es privilegiado escapa al nodo; si su ServiceAccount tiene permisos altos, ataca la API. Hardening (PSA, securityContext, RBAC mínimo, NetworkPolicy) rompe esa cadena.</a:t>
-            </a:r>
-          </a:p>
-          <a:p>
-            <a:pPr>
-              <a:spcAft>
-                <a:spcPts val="600"/>
-              </a:spcAft>
-            </a:pPr>
-            <a:r>
-              <a:rPr sz="1500">
-                <a:solidFill>
-                  <a:srgbClr val="22282E"/>
-                </a:solidFill>
-              </a:rPr>
-              <a:t>•  ❓ ¿Es suficiente kube-bench para asegurar el clúster?</a:t>
-            </a:r>
-          </a:p>
-          <a:p>
-            <a:pPr>
-              <a:spcAft>
-                <a:spcPts val="600"/>
-              </a:spcAft>
-            </a:pPr>
-            <a:r>
-              <a:rPr sz="1500">
-                <a:solidFill>
-                  <a:srgbClr val="22282E"/>
-                </a:solidFill>
-              </a:rPr>
-              <a:t>•  Es una base excelente de configuración CIS, pero no cubre RBAC excesivo, imágenes vulnerables ni cargas mal escritas. Complétalo con kubeaudit, Trivy y revisión de NetworkPolicies.</a:t>
+              <a:t>•  Escribe un securityContext que impida correr como root y monte el filesystem read-only.</a:t>
+            </a:r>
+          </a:p>
+          <a:p>
+            <a:pPr>
+              <a:spcAft>
+                <a:spcPts val="600"/>
+              </a:spcAft>
+            </a:pPr>
+            <a:r>
+              <a:rPr sz="1500">
+                <a:solidFill>
+                  <a:srgbClr val="22282E"/>
+                </a:solidFill>
+              </a:rPr>
+              <a:t>•  Convierte un namespace a Pod Security restricted y ajusta los pods que dejen de desplegar.</a:t>
+            </a:r>
+          </a:p>
+          <a:p>
+            <a:pPr>
+              <a:spcAft>
+                <a:spcPts val="600"/>
+              </a:spcAft>
+            </a:pPr>
+            <a:r>
+              <a:rPr sz="1500">
+                <a:solidFill>
+                  <a:srgbClr val="22282E"/>
+                </a:solidFill>
+              </a:rPr>
+              <a:t>•  Encuentra con kubeaudit todos los pods que permiten privilege escalation.</a:t>
+            </a:r>
+          </a:p>
+          <a:p>
+            <a:pPr>
+              <a:spcAft>
+                <a:spcPts val="600"/>
+              </a:spcAft>
+            </a:pPr>
+            <a:r>
+              <a:rPr sz="1500">
+                <a:solidFill>
+                  <a:srgbClr val="22282E"/>
+                </a:solidFill>
+              </a:rPr>
+              <a:t>•  Diseña una NetworkPolicy default-deny y una regla que permita solo el tráfico de una app a su base de datos.</a:t>
+            </a:r>
+          </a:p>
+          <a:p>
+            <a:pPr>
+              <a:spcAft>
+                <a:spcPts val="600"/>
+              </a:spcAft>
+            </a:pPr>
+            <a:r>
+              <a:rPr sz="1500">
+                <a:solidFill>
+                  <a:srgbClr val="22282E"/>
+                </a:solidFill>
+              </a:rPr>
+              <a:t>•  Identifica qué ClusterRoles otorgan  sobre  y propuestas de recorte.</a:t>
+            </a:r>
+          </a:p>
+          <a:p>
+            <a:pPr>
+              <a:spcAft>
+                <a:spcPts val="600"/>
+              </a:spcAft>
+            </a:pPr>
+            <a:r>
+              <a:rPr sz="1500">
+                <a:solidFill>
+                  <a:srgbClr val="22282E"/>
+                </a:solidFill>
+              </a:rPr>
+              <a:t>•  Documenta un escape de pod y la combinación exacta de controles que lo bloquea.</a:t>
             </a:r>
           </a:p>
         </p:txBody>
@@ -3511,7 +3545,7 @@
                   <a:srgbClr val="0B3D2E"/>
                 </a:solidFill>
               </a:rPr>
-              <a:t>🔗 Referencias</a:t>
+              <a:t>📝 Reto verificable</a:t>
             </a:r>
           </a:p>
         </p:txBody>
@@ -3549,71 +3583,623 @@
                   <a:srgbClr val="22282E"/>
                 </a:solidFill>
               </a:rPr>
-              <a:t>•  Martin &amp; Hausenblas, Hacking Kubernetes, O'Reilly. &lt;https://www.oreilly.com/library/view/hacking-kubernetes/9781492081722/&gt;</a:t>
-            </a:r>
-          </a:p>
-          <a:p>
-            <a:pPr>
-              <a:spcAft>
-                <a:spcPts val="600"/>
-              </a:spcAft>
-            </a:pPr>
-            <a:r>
-              <a:rPr sz="1500">
-                <a:solidFill>
-                  <a:srgbClr val="22282E"/>
-                </a:solidFill>
-              </a:rPr>
-              <a:t>•  CIS Kubernetes Benchmark. &lt;https://www.cisecurity.org/benchmark/kubernetes&gt;</a:t>
-            </a:r>
-          </a:p>
-          <a:p>
-            <a:pPr>
-              <a:spcAft>
-                <a:spcPts val="600"/>
-              </a:spcAft>
-            </a:pPr>
-            <a:r>
-              <a:rPr sz="1500">
-                <a:solidFill>
-                  <a:srgbClr val="22282E"/>
-                </a:solidFill>
-              </a:rPr>
-              <a:t>•  Kubernetes — Pod Security Admission. &lt;https://kubernetes.io/docs/concepts/security/pod-security-admission/&gt;</a:t>
-            </a:r>
-          </a:p>
-          <a:p>
-            <a:pPr>
-              <a:spcAft>
-                <a:spcPts val="600"/>
-              </a:spcAft>
-            </a:pPr>
-            <a:r>
-              <a:rPr sz="1500">
-                <a:solidFill>
-                  <a:srgbClr val="22282E"/>
-                </a:solidFill>
-              </a:rPr>
-              <a:t>•  kube-bench. &lt;https://github.com/aquasecurity/kube-bench&gt;</a:t>
-            </a:r>
-          </a:p>
-          <a:p>
-            <a:pPr>
-              <a:spcAft>
-                <a:spcPts val="600"/>
-              </a:spcAft>
-            </a:pPr>
-            <a:r>
-              <a:rPr sz="1500">
-                <a:solidFill>
-                  <a:srgbClr val="22282E"/>
-                </a:solidFill>
-              </a:rPr>
-              <a:t>•  Kubernetes — Network Policies. &lt;https://kubernetes.io/docs/concepts/services-networking/network-policies/&gt;</a:t>
-            </a:r>
-          </a:p>
-        </p:txBody>
-      </p:sp>
+              <a:t>•  Parte de un clúster "por defecto" con un Deployment vulnerable y llévalo a un estado endurecido:</a:t>
+            </a:r>
+          </a:p>
+          <a:p>
+            <a:pPr>
+              <a:spcAft>
+                <a:spcPts val="600"/>
+              </a:spcAft>
+            </a:pPr>
+            <a:r>
+              <a:rPr sz="1500">
+                <a:solidFill>
+                  <a:srgbClr val="22282E"/>
+                </a:solidFill>
+              </a:rPr>
+              <a:t>•  PSA restricted, NetworkPolicy default-deny, RBAC mínimo y securityContext en todos los pods.</a:t>
+            </a:r>
+          </a:p>
+          <a:p>
+            <a:pPr>
+              <a:spcAft>
+                <a:spcPts val="600"/>
+              </a:spcAft>
+            </a:pPr>
+            <a:r>
+              <a:rPr sz="1500">
+                <a:solidFill>
+                  <a:srgbClr val="22282E"/>
+                </a:solidFill>
+              </a:rPr>
+              <a:t>•  Criterio de aceptación: el ataque de pod privilegiado del laboratorio ya no puede desplegarse</a:t>
+            </a:r>
+          </a:p>
+          <a:p>
+            <a:pPr>
+              <a:spcAft>
+                <a:spcPts val="600"/>
+              </a:spcAft>
+            </a:pPr>
+            <a:r>
+              <a:rPr sz="1500">
+                <a:solidFill>
+                  <a:srgbClr val="22282E"/>
+                </a:solidFill>
+              </a:rPr>
+              <a:t>•  (rechazado por PSA), kube-bench muestra los controles antes fallidos como PASS, y un pod</a:t>
+            </a:r>
+          </a:p>
+          <a:p>
+            <a:pPr>
+              <a:spcAft>
+                <a:spcPts val="600"/>
+              </a:spcAft>
+            </a:pPr>
+            <a:r>
+              <a:rPr sz="1500">
+                <a:solidFill>
+                  <a:srgbClr val="22282E"/>
+                </a:solidFill>
+              </a:rPr>
+              <a:t>•  comprometido ya no alcanza a otros pods por red.</a:t>
+            </a:r>
+          </a:p>
+        </p:txBody>
+      </p:sp>
+    </p:spTree>
+  </p:cSld>
+  <p:clrMapOvr>
+    <a:masterClrMapping/>
+  </p:clrMapOvr>
+</p:sld>
+</file>
+
+<file path=ppt/slides/slide13.xml><?xml version="1.0" encoding="utf-8"?>
+<p:sld xmlns:a="http://schemas.openxmlformats.org/drawingml/2006/main" xmlns:p="http://schemas.openxmlformats.org/presentationml/2006/main" xmlns:r="http://schemas.openxmlformats.org/officeDocument/2006/relationships">
+  <p:cSld>
+    <p:spTree>
+      <p:nvGrpSpPr>
+        <p:cNvPr id="1" name=""/>
+        <p:cNvGrpSpPr/>
+        <p:nvPr/>
+      </p:nvGrpSpPr>
+      <p:grpSpPr/>
+      <p:sp>
+        <p:nvSpPr>
+          <p:cNvPr id="2" name="TextBox 1"/>
+          <p:cNvSpPr txBox="1"/>
+          <p:nvPr/>
+        </p:nvSpPr>
+        <p:spPr>
+          <a:xfrm>
+            <a:off x="457200" y="320040"/>
+            <a:ext cx="8229600" cy="822960"/>
+          </a:xfrm>
+          <a:prstGeom prst="rect">
+            <a:avLst/>
+          </a:prstGeom>
+          <a:noFill/>
+        </p:spPr>
+        <p:txBody>
+          <a:bodyPr wrap="square">
+            <a:spAutoFit/>
+          </a:bodyPr>
+          <a:lstStyle/>
+          <a:p>
+            <a:r>
+              <a:rPr sz="2600" b="1">
+                <a:solidFill>
+                  <a:srgbClr val="0B3D2E"/>
+                </a:solidFill>
+              </a:rPr>
+              <a:t>⚠️ Errores comunes</a:t>
+            </a:r>
+          </a:p>
+        </p:txBody>
+      </p:sp>
+      <p:sp>
+        <p:nvSpPr>
+          <p:cNvPr id="3" name="TextBox 2"/>
+          <p:cNvSpPr txBox="1"/>
+          <p:nvPr/>
+        </p:nvSpPr>
+        <p:spPr>
+          <a:xfrm>
+            <a:off x="457200" y="1280160"/>
+            <a:ext cx="8229600" cy="4937760"/>
+          </a:xfrm>
+          <a:prstGeom prst="rect">
+            <a:avLst/>
+          </a:prstGeom>
+          <a:noFill/>
+        </p:spPr>
+        <p:txBody>
+          <a:bodyPr wrap="square">
+            <a:spAutoFit/>
+          </a:bodyPr>
+          <a:lstStyle/>
+          <a:p>
+            <a:pPr>
+              <a:spcAft>
+                <a:spcPts val="600"/>
+              </a:spcAft>
+            </a:pPr>
+            <a:r>
+              <a:rPr sz="1500">
+                <a:solidFill>
+                  <a:srgbClr val="22282E"/>
+                </a:solidFill>
+              </a:rPr>
+              <a:t>•  PSA no bloquea pods peligrosos — Namespace en modo privileged o solo warn; ponlo en enforce: restricted.</a:t>
+            </a:r>
+          </a:p>
+          <a:p>
+            <a:pPr>
+              <a:spcAft>
+                <a:spcPts val="600"/>
+              </a:spcAft>
+            </a:pPr>
+            <a:r>
+              <a:rPr sz="1500">
+                <a:solidFill>
+                  <a:srgbClr val="22282E"/>
+                </a:solidFill>
+              </a:rPr>
+              <a:t>•  NetworkPolicy "no hace nada" — El CNI no la soporta; usa Calico/Cilium y aplica default-deny primero.</a:t>
+            </a:r>
+          </a:p>
+          <a:p>
+            <a:pPr>
+              <a:spcAft>
+                <a:spcPts val="600"/>
+              </a:spcAft>
+            </a:pPr>
+            <a:r>
+              <a:rPr sz="1500">
+                <a:solidFill>
+                  <a:srgbClr val="22282E"/>
+                </a:solidFill>
+              </a:rPr>
+              <a:t>•  Pod no arranca tras hardening — runAsNonRoot sin usuario válido o ruta que exige escritura; ajusta UID y monta tmpfs.</a:t>
+            </a:r>
+          </a:p>
+          <a:p>
+            <a:pPr>
+              <a:spcAft>
+                <a:spcPts val="600"/>
+              </a:spcAft>
+            </a:pPr>
+            <a:r>
+              <a:rPr sz="1500">
+                <a:solidFill>
+                  <a:srgbClr val="22282E"/>
+                </a:solidFill>
+              </a:rPr>
+              <a:t>•  RBAC amplio "porque es más fácil" — Superficie de escalada enorme; refactoriza a Roles concretos por namespace.</a:t>
+            </a:r>
+          </a:p>
+          <a:p>
+            <a:pPr>
+              <a:spcAft>
+                <a:spcPts val="600"/>
+              </a:spcAft>
+            </a:pPr>
+            <a:r>
+              <a:rPr sz="1500">
+                <a:solidFill>
+                  <a:srgbClr val="22282E"/>
+                </a:solidFill>
+              </a:rPr>
+              <a:t>•  Token de SA permite más acceso del esperado — El ServiceAccount o una ruta indirecta posee permisos amplios. Revisa RBAC efectivo, audiencia, expiración y necesidad de automount.</a:t>
+            </a:r>
+          </a:p>
+        </p:txBody>
+      </p:sp>
+    </p:spTree>
+  </p:cSld>
+  <p:clrMapOvr>
+    <a:masterClrMapping/>
+  </p:clrMapOvr>
+</p:sld>
+</file>
+
+<file path=ppt/slides/slide14.xml><?xml version="1.0" encoding="utf-8"?>
+<p:sld xmlns:a="http://schemas.openxmlformats.org/drawingml/2006/main" xmlns:p="http://schemas.openxmlformats.org/presentationml/2006/main" xmlns:r="http://schemas.openxmlformats.org/officeDocument/2006/relationships">
+  <p:cSld>
+    <p:spTree>
+      <p:nvGrpSpPr>
+        <p:cNvPr id="1" name=""/>
+        <p:cNvGrpSpPr/>
+        <p:nvPr/>
+      </p:nvGrpSpPr>
+      <p:grpSpPr/>
+      <p:sp>
+        <p:nvSpPr>
+          <p:cNvPr id="2" name="TextBox 1"/>
+          <p:cNvSpPr txBox="1"/>
+          <p:nvPr/>
+        </p:nvSpPr>
+        <p:spPr>
+          <a:xfrm>
+            <a:off x="457200" y="320040"/>
+            <a:ext cx="8229600" cy="822960"/>
+          </a:xfrm>
+          <a:prstGeom prst="rect">
+            <a:avLst/>
+          </a:prstGeom>
+          <a:noFill/>
+        </p:spPr>
+        <p:txBody>
+          <a:bodyPr wrap="square">
+            <a:spAutoFit/>
+          </a:bodyPr>
+          <a:lstStyle/>
+          <a:p>
+            <a:r>
+              <a:rPr sz="2600" b="1">
+                <a:solidFill>
+                  <a:srgbClr val="0B3D2E"/>
+                </a:solidFill>
+              </a:rPr>
+              <a:t>❓ Preguntas frecuentes</a:t>
+            </a:r>
+          </a:p>
+        </p:txBody>
+      </p:sp>
+      <p:sp>
+        <p:nvSpPr>
+          <p:cNvPr id="3" name="TextBox 2"/>
+          <p:cNvSpPr txBox="1"/>
+          <p:nvPr/>
+        </p:nvSpPr>
+        <p:spPr>
+          <a:xfrm>
+            <a:off x="457200" y="1280160"/>
+            <a:ext cx="8229600" cy="4937760"/>
+          </a:xfrm>
+          <a:prstGeom prst="rect">
+            <a:avLst/>
+          </a:prstGeom>
+          <a:noFill/>
+        </p:spPr>
+        <p:txBody>
+          <a:bodyPr wrap="square">
+            <a:spAutoFit/>
+          </a:bodyPr>
+          <a:lstStyle/>
+          <a:p>
+            <a:pPr>
+              <a:spcAft>
+                <a:spcPts val="600"/>
+              </a:spcAft>
+            </a:pPr>
+            <a:r>
+              <a:rPr sz="1500">
+                <a:solidFill>
+                  <a:srgbClr val="22282E"/>
+                </a:solidFill>
+              </a:rPr>
+              <a:t>•  ❓ ¿Por qué desapareció PodSecurityPolicy y qué la reemplaza?</a:t>
+            </a:r>
+          </a:p>
+          <a:p>
+            <a:pPr>
+              <a:spcAft>
+                <a:spcPts val="600"/>
+              </a:spcAft>
+            </a:pPr>
+            <a:r>
+              <a:rPr sz="1500">
+                <a:solidFill>
+                  <a:srgbClr val="22282E"/>
+                </a:solidFill>
+              </a:rPr>
+              <a:t>•  Las PSP se eliminaron en Kubernetes 1.25 por ser complejas y confusas. Su reemplazo es Pod Security Admission (niveles baseline/restricted por namespace) o políticas con OPA Gatekeeper/Kyverno.</a:t>
+            </a:r>
+          </a:p>
+          <a:p>
+            <a:pPr>
+              <a:spcAft>
+                <a:spcPts val="600"/>
+              </a:spcAft>
+            </a:pPr>
+            <a:r>
+              <a:rPr sz="1500">
+                <a:solidFill>
+                  <a:srgbClr val="22282E"/>
+                </a:solidFill>
+              </a:rPr>
+              <a:t>•  ❓ ¿Un pod comprometido significa clúster comprometido?</a:t>
+            </a:r>
+          </a:p>
+          <a:p>
+            <a:pPr>
+              <a:spcAft>
+                <a:spcPts val="600"/>
+              </a:spcAft>
+            </a:pPr>
+            <a:r>
+              <a:rPr sz="1500">
+                <a:solidFill>
+                  <a:srgbClr val="22282E"/>
+                </a:solidFill>
+              </a:rPr>
+              <a:t>•  No necesariamente, pero puede escalar: si el pod es privilegiado escapa al nodo; si su ServiceAccount tiene permisos altos, ataca la API. Hardening (PSA, securityContext, RBAC mínimo, NetworkPolicy)…</a:t>
+            </a:r>
+          </a:p>
+          <a:p>
+            <a:pPr>
+              <a:spcAft>
+                <a:spcPts val="600"/>
+              </a:spcAft>
+            </a:pPr>
+            <a:r>
+              <a:rPr sz="1500">
+                <a:solidFill>
+                  <a:srgbClr val="22282E"/>
+                </a:solidFill>
+              </a:rPr>
+              <a:t>•  ❓ ¿Es suficiente kube-bench para asegurar el clúster?</a:t>
+            </a:r>
+          </a:p>
+          <a:p>
+            <a:pPr>
+              <a:spcAft>
+                <a:spcPts val="600"/>
+              </a:spcAft>
+            </a:pPr>
+            <a:r>
+              <a:rPr sz="1500">
+                <a:solidFill>
+                  <a:srgbClr val="22282E"/>
+                </a:solidFill>
+              </a:rPr>
+              <a:t>•  Es una base excelente de configuración CIS, pero no cubre RBAC excesivo, imágenes vulnerables ni cargas mal escritas. Complétalo con kubeaudit, Trivy y revisión de NetworkPolicies.</a:t>
+            </a:r>
+          </a:p>
+        </p:txBody>
+      </p:sp>
+    </p:spTree>
+  </p:cSld>
+  <p:clrMapOvr>
+    <a:masterClrMapping/>
+  </p:clrMapOvr>
+</p:sld>
+</file>
+
+<file path=ppt/slides/slide15.xml><?xml version="1.0" encoding="utf-8"?>
+<p:sld xmlns:a="http://schemas.openxmlformats.org/drawingml/2006/main" xmlns:p="http://schemas.openxmlformats.org/presentationml/2006/main" xmlns:r="http://schemas.openxmlformats.org/officeDocument/2006/relationships">
+  <p:cSld>
+    <p:spTree>
+      <p:nvGrpSpPr>
+        <p:cNvPr id="1" name=""/>
+        <p:cNvGrpSpPr/>
+        <p:nvPr/>
+      </p:nvGrpSpPr>
+      <p:grpSpPr/>
+      <p:sp>
+        <p:nvSpPr>
+          <p:cNvPr id="2" name="TextBox 1"/>
+          <p:cNvSpPr txBox="1"/>
+          <p:nvPr/>
+        </p:nvSpPr>
+        <p:spPr>
+          <a:xfrm>
+            <a:off x="457200" y="320040"/>
+            <a:ext cx="8229600" cy="822960"/>
+          </a:xfrm>
+          <a:prstGeom prst="rect">
+            <a:avLst/>
+          </a:prstGeom>
+          <a:noFill/>
+        </p:spPr>
+        <p:txBody>
+          <a:bodyPr wrap="square">
+            <a:spAutoFit/>
+          </a:bodyPr>
+          <a:lstStyle/>
+          <a:p>
+            <a:r>
+              <a:rPr sz="2600" b="1">
+                <a:solidFill>
+                  <a:srgbClr val="0B3D2E"/>
+                </a:solidFill>
+              </a:rPr>
+              <a:t>🔗 Referencias verificables y alcance</a:t>
+            </a:r>
+          </a:p>
+        </p:txBody>
+      </p:sp>
+      <p:sp>
+        <p:nvSpPr>
+          <p:cNvPr id="3" name="TextBox 2"/>
+          <p:cNvSpPr txBox="1"/>
+          <p:nvPr/>
+        </p:nvSpPr>
+        <p:spPr>
+          <a:xfrm>
+            <a:off x="457200" y="1280160"/>
+            <a:ext cx="8229600" cy="4937760"/>
+          </a:xfrm>
+          <a:prstGeom prst="rect">
+            <a:avLst/>
+          </a:prstGeom>
+          <a:noFill/>
+        </p:spPr>
+        <p:txBody>
+          <a:bodyPr wrap="square">
+            <a:spAutoFit/>
+          </a:bodyPr>
+          <a:lstStyle/>
+          <a:p>
+            <a:pPr>
+              <a:spcAft>
+                <a:spcPts val="600"/>
+              </a:spcAft>
+            </a:pPr>
+            <a:r>
+              <a:rPr sz="1500">
+                <a:solidFill>
+                  <a:srgbClr val="22282E"/>
+                </a:solidFill>
+              </a:rPr>
+              <a:t>•  Kubernetes — Pod Security Admission. &lt;https://kubernetes.io/docs/concepts/security/pod-security-admission/&gt; — niveles, modos y versionado oficiales.</a:t>
+            </a:r>
+          </a:p>
+          <a:p>
+            <a:pPr>
+              <a:spcAft>
+                <a:spcPts val="600"/>
+              </a:spcAft>
+            </a:pPr>
+            <a:r>
+              <a:rPr sz="1500">
+                <a:solidFill>
+                  <a:srgbClr val="22282E"/>
+                </a:solidFill>
+              </a:rPr>
+              <a:t>•  Kubernetes — RBAC Good Practices. &lt;https://kubernetes.io/docs/concepts/security/rbac-good-practices/&gt; — rutas de escalada documentadas por el proyecto.</a:t>
+            </a:r>
+          </a:p>
+          <a:p>
+            <a:pPr>
+              <a:spcAft>
+                <a:spcPts val="600"/>
+              </a:spcAft>
+            </a:pPr>
+            <a:r>
+              <a:rPr sz="1500">
+                <a:solidFill>
+                  <a:srgbClr val="22282E"/>
+                </a:solidFill>
+              </a:rPr>
+              <a:t>•  Kubernetes — Network Policies. &lt;https://kubernetes.io/docs/concepts/services-networking/network-policies/&gt; — semántica y dependencia del plugin.</a:t>
+            </a:r>
+          </a:p>
+          <a:p>
+            <a:pPr>
+              <a:spcAft>
+                <a:spcPts val="600"/>
+              </a:spcAft>
+            </a:pPr>
+            <a:r>
+              <a:rPr sz="1500">
+                <a:solidFill>
+                  <a:srgbClr val="22282E"/>
+                </a:solidFill>
+              </a:rPr>
+              <a:t>•  CIS Kubernetes Benchmark. &lt;https://www.cisecurity.org/benchmark/kubernetes&gt; — baseline según distribución y versión.</a:t>
+            </a:r>
+          </a:p>
+          <a:p>
+            <a:pPr>
+              <a:spcAft>
+                <a:spcPts val="600"/>
+              </a:spcAft>
+            </a:pPr>
+            <a:r>
+              <a:rPr sz="1500">
+                <a:solidFill>
+                  <a:srgbClr val="22282E"/>
+                </a:solidFill>
+              </a:rPr>
+              <a:t>•  kube-bench. &lt;https://github.com/aquasecurity/kube-bench&gt; — automatización del benchmark; revisar target y configuración.</a:t>
+            </a:r>
+          </a:p>
+          <a:p>
+            <a:pPr>
+              <a:spcAft>
+                <a:spcPts val="600"/>
+              </a:spcAft>
+            </a:pPr>
+            <a:r>
+              <a:rPr sz="1500">
+                <a:solidFill>
+                  <a:srgbClr val="22282E"/>
+                </a:solidFill>
+              </a:rPr>
+              <a:t>•  Martin y Hausenblas, Hacking Kubernetes. &lt;https://www.oreilly.com/library/view/hacking-kubernetes/9781492081722/&gt; — escenarios complementarios controlados.</a:t>
+            </a:r>
+          </a:p>
+        </p:txBody>
+      </p:sp>
+    </p:spTree>
+  </p:cSld>
+  <p:clrMapOvr>
+    <a:masterClrMapping/>
+  </p:clrMapOvr>
+</p:sld>
+</file>
+
+<file path=ppt/slides/slide16.xml><?xml version="1.0" encoding="utf-8"?>
+<p:sld xmlns:a="http://schemas.openxmlformats.org/drawingml/2006/main" xmlns:p="http://schemas.openxmlformats.org/presentationml/2006/main" xmlns:r="http://schemas.openxmlformats.org/officeDocument/2006/relationships">
+  <p:cSld>
+    <p:spTree>
+      <p:nvGrpSpPr>
+        <p:cNvPr id="1" name=""/>
+        <p:cNvGrpSpPr/>
+        <p:nvPr/>
+      </p:nvGrpSpPr>
+      <p:grpSpPr/>
+      <p:sp>
+        <p:nvSpPr>
+          <p:cNvPr id="2" name="TextBox 1"/>
+          <p:cNvSpPr txBox="1"/>
+          <p:nvPr/>
+        </p:nvSpPr>
+        <p:spPr>
+          <a:xfrm>
+            <a:off x="457200" y="274320"/>
+            <a:ext cx="8229600" cy="640080"/>
+          </a:xfrm>
+          <a:prstGeom prst="rect">
+            <a:avLst/>
+          </a:prstGeom>
+          <a:noFill/>
+        </p:spPr>
+        <p:txBody>
+          <a:bodyPr wrap="square">
+            <a:spAutoFit/>
+          </a:bodyPr>
+          <a:lstStyle/>
+          <a:p>
+            <a:r>
+              <a:rPr sz="2200" b="1">
+                <a:solidFill>
+                  <a:srgbClr val="0B3D2E"/>
+                </a:solidFill>
+              </a:rPr>
+              <a:t>Diagrama de la clase</a:t>
+            </a:r>
+          </a:p>
+        </p:txBody>
+      </p:sp>
+      <p:pic>
+        <p:nvPicPr>
+          <p:cNvPr id="3" name="Picture 2" descr="4a451e2784e18585.png"/>
+          <p:cNvPicPr>
+            <a:picLocks noChangeAspect="1"/>
+          </p:cNvPicPr>
+          <p:nvPr/>
+        </p:nvPicPr>
+        <p:blipFill>
+          <a:blip r:embed="rId2"/>
+          <a:stretch>
+            <a:fillRect/>
+          </a:stretch>
+        </p:blipFill>
+        <p:spPr>
+          <a:xfrm>
+            <a:off x="849171" y="1097280"/>
+            <a:ext cx="7445658" cy="5303520"/>
+          </a:xfrm>
+          <a:prstGeom prst="rect">
+            <a:avLst/>
+          </a:prstGeom>
+        </p:spPr>
+      </p:pic>
     </p:spTree>
   </p:cSld>
   <p:clrMapOvr>
@@ -4137,7 +4723,7 @@
                   <a:srgbClr val="0B3D2E"/>
                 </a:solidFill>
               </a:rPr>
-              <a:t>📖 Definiciones y características</a:t>
+              <a:t>🧠 Explicación en profundidad</a:t>
             </a:r>
           </a:p>
         </p:txBody>
@@ -4175,97 +4761,82 @@
                   <a:srgbClr val="22282E"/>
                 </a:solidFill>
               </a:rPr>
-              <a:t>•  Pod Security Admission (PSA): admission controller con niveles privileged/baseline/restricted. Clave: restricted bloquea pods peligrosos por namespace.</a:t>
-            </a:r>
-          </a:p>
-          <a:p>
-            <a:pPr>
-              <a:spcAft>
-                <a:spcPts val="600"/>
-              </a:spcAft>
-            </a:pPr>
-            <a:r>
-              <a:rPr sz="1500">
-                <a:solidFill>
-                  <a:srgbClr val="22282E"/>
-                </a:solidFill>
-              </a:rPr>
-              <a:t>•  securityContext: ajustes de seguridad del pod/contenedor (runAsNonRoot, readOnlyRootFilesystem, drop capabilities). Clave: el equivalente al hardening de Docker en K8s.</a:t>
-            </a:r>
-          </a:p>
-          <a:p>
-            <a:pPr>
-              <a:spcAft>
-                <a:spcPts val="600"/>
-              </a:spcAft>
-            </a:pPr>
-            <a:r>
-              <a:rPr sz="1500">
-                <a:solidFill>
-                  <a:srgbClr val="22282E"/>
-                </a:solidFill>
-              </a:rPr>
-              <a:t>•  Escape de pod: salir del contenedor al nodo (vía privileged, hostPath, hostPID). Clave: convierte un pod comprometido en compromiso del nodo.</a:t>
-            </a:r>
-          </a:p>
-          <a:p>
-            <a:pPr>
-              <a:spcAft>
-                <a:spcPts val="600"/>
-              </a:spcAft>
-            </a:pPr>
-            <a:r>
-              <a:rPr sz="1500">
-                <a:solidFill>
-                  <a:srgbClr val="22282E"/>
-                </a:solidFill>
-              </a:rPr>
-              <a:t>•  RBAC escalate/bind: verbos que permiten otorgarse más permisos. Clave: deben restringirse; equivalen a admin.</a:t>
-            </a:r>
-          </a:p>
-          <a:p>
-            <a:pPr>
-              <a:spcAft>
-                <a:spcPts val="600"/>
-              </a:spcAft>
-            </a:pPr>
-            <a:r>
-              <a:rPr sz="1500">
-                <a:solidFill>
-                  <a:srgbClr val="22282E"/>
-                </a:solidFill>
-              </a:rPr>
-              <a:t>•  Token de ServiceAccount: JWT montado en el pod para hablar con la API. Clave: si se roba, el atacante actúa como ese SA.</a:t>
-            </a:r>
-          </a:p>
-          <a:p>
-            <a:pPr>
-              <a:spcAft>
-                <a:spcPts val="600"/>
-              </a:spcAft>
-            </a:pPr>
-            <a:r>
-              <a:rPr sz="1500">
-                <a:solidFill>
-                  <a:srgbClr val="22282E"/>
-                </a:solidFill>
-              </a:rPr>
-              <a:t>•  NetworkPolicy default-deny: política que bloquea todo el tráfico salvo lo permitido. Clave: imprescindible para contener movimiento lateral.</a:t>
-            </a:r>
-          </a:p>
-          <a:p>
-            <a:pPr>
-              <a:spcAft>
-                <a:spcPts val="600"/>
-              </a:spcAft>
-            </a:pPr>
-            <a:r>
-              <a:rPr sz="1500">
-                <a:solidFill>
-                  <a:srgbClr val="22282E"/>
-                </a:solidFill>
-              </a:rPr>
-              <a:t>•  kube-bench: herramienta que evalúa el CIS Benchmark. Clave: automatiza la auditoría de hardening.</a:t>
+              <a:t>•  Hardening de Kubernetes reduce caminos desde una carga comprometida hacia otras cargas, la API o el nodo. Un benchmark aporta controles verificables para una distribución y versión, pero no conoce la…</a:t>
+            </a:r>
+          </a:p>
+          <a:p>
+            <a:pPr>
+              <a:spcAft>
+                <a:spcPts val="600"/>
+              </a:spcAft>
+            </a:pPr>
+            <a:r>
+              <a:rPr sz="1500">
+                <a:solidFill>
+                  <a:srgbClr val="22282E"/>
+                </a:solidFill>
+              </a:rPr>
+              <a:t>•  El diagrama toma un Pod comprometido como punto de partida. Cada control limita una rama, pero ninguno cubre todas. PSA no restringe llamadas API del ServiceAccount; RBAC no impide un escape de…</a:t>
+            </a:r>
+          </a:p>
+          <a:p>
+            <a:pPr>
+              <a:spcAft>
+                <a:spcPts val="600"/>
+              </a:spcAft>
+            </a:pPr>
+            <a:r>
+              <a:rPr sz="1500">
+                <a:solidFill>
+                  <a:srgbClr val="22282E"/>
+                </a:solidFill>
+              </a:rPr>
+              <a:t>•  Pod Security Admission aplica niveles privileged, baseline y restricted mediante labels de namespace en modos enforce, audit y warn. La versión de la política puede fijarse para evitar cambios…</a:t>
+            </a:r>
+          </a:p>
+          <a:p>
+            <a:pPr>
+              <a:spcAft>
+                <a:spcPts val="600"/>
+              </a:spcAft>
+            </a:pPr>
+            <a:r>
+              <a:rPr sz="1500">
+                <a:solidFill>
+                  <a:srgbClr val="22282E"/>
+                </a:solidFill>
+              </a:rPr>
+              <a:t>•  runAsNonRoot, allowPrivilegeEscalation: false, capabilities eliminadas, seccomp y filesystem read-only se prueban con la imagen real. Un UID no root todavía puede acceder a datos montados; read-only…</a:t>
+            </a:r>
+          </a:p>
+          <a:p>
+            <a:pPr>
+              <a:spcAft>
+                <a:spcPts val="600"/>
+              </a:spcAft>
+            </a:pPr>
+            <a:r>
+              <a:rPr sz="1500">
+                <a:solidFill>
+                  <a:srgbClr val="22282E"/>
+                </a:solidFill>
+              </a:rPr>
+              <a:t>•  Kubernetes documenta que crear workloads puede permitir montar Secrets, usar ServiceAccounts del namespace o acceder a volúmenes. bind, escalate, impersonate, aprobación de CSR, modificación de…</a:t>
+            </a:r>
+          </a:p>
+          <a:p>
+            <a:pPr>
+              <a:spcAft>
+                <a:spcPts val="600"/>
+              </a:spcAft>
+            </a:pPr>
+            <a:r>
+              <a:rPr sz="1500">
+                <a:solidFill>
+                  <a:srgbClr val="22282E"/>
+                </a:solidFill>
+              </a:rPr>
+              <a:t>•  Default-deny cambia el namespace a aislamiento por selección, pero necesita un CNI compatible y reglas explícitas para DNS, ingress controllers y dependencias. El acceso directo a kubelet o etcd…</a:t>
             </a:r>
           </a:p>
         </p:txBody>
@@ -4316,7 +4887,7 @@
                   <a:srgbClr val="0B3D2E"/>
                 </a:solidFill>
               </a:rPr>
-              <a:t>🧰 Herramientas y preparación</a:t>
+              <a:t>📖 Definiciones y características</a:t>
             </a:r>
           </a:p>
         </p:txBody>
@@ -4354,82 +4925,97 @@
                   <a:srgbClr val="22282E"/>
                 </a:solidFill>
               </a:rPr>
-              <a:t>•  Clúster de laboratorio (kind/minikube) sobre el que tengas control total.</a:t>
-            </a:r>
-          </a:p>
-          <a:p>
-            <a:pPr>
-              <a:spcAft>
-                <a:spcPts val="600"/>
-              </a:spcAft>
-            </a:pPr>
-            <a:r>
-              <a:rPr sz="1500">
-                <a:solidFill>
-                  <a:srgbClr val="22282E"/>
-                </a:solidFill>
-              </a:rPr>
-              <a:t>•  kube-bench, kubeaudit, kubescape, Trivy (modo k8s) y kubectl.</a:t>
-            </a:r>
-          </a:p>
-          <a:p>
-            <a:pPr>
-              <a:spcAft>
-                <a:spcPts val="600"/>
-              </a:spcAft>
-            </a:pPr>
-            <a:r>
-              <a:rPr sz="1500">
-                <a:solidFill>
-                  <a:srgbClr val="22282E"/>
-                </a:solidFill>
-              </a:rPr>
-              <a:t>•  Un CNI que soporte NetworkPolicy (p. ej. Calico) para las prácticas de red.</a:t>
-            </a:r>
-          </a:p>
-          <a:p>
-            <a:pPr>
-              <a:spcAft>
-                <a:spcPts val="600"/>
-              </a:spcAft>
-            </a:pPr>
-            <a:r>
-              <a:rPr sz="1500">
-                <a:solidFill>
-                  <a:srgbClr val="22282E"/>
-                </a:solidFill>
-              </a:rPr>
-              <a:t>•  kube-bench run --targets master,node</a:t>
-            </a:r>
-          </a:p>
-          <a:p>
-            <a:pPr>
-              <a:spcAft>
-                <a:spcPts val="600"/>
-              </a:spcAft>
-            </a:pPr>
-            <a:r>
-              <a:rPr sz="1500">
-                <a:solidFill>
-                  <a:srgbClr val="22282E"/>
-                </a:solidFill>
-              </a:rPr>
-              <a:t>•  kubeaudit all -f manifest.yaml</a:t>
-            </a:r>
-          </a:p>
-          <a:p>
-            <a:pPr>
-              <a:spcAft>
-                <a:spcPts val="600"/>
-              </a:spcAft>
-            </a:pPr>
-            <a:r>
-              <a:rPr sz="1500">
-                <a:solidFill>
-                  <a:srgbClr val="22282E"/>
-                </a:solidFill>
-              </a:rPr>
-              <a:t>•  trivy k8s --report summary cluster</a:t>
+              <a:t>•  Pod Security Admission (PSA): admission controller con niveles privileged/baseline/restricted. Clave: restricted bloquea pods peligrosos por namespace.</a:t>
+            </a:r>
+          </a:p>
+          <a:p>
+            <a:pPr>
+              <a:spcAft>
+                <a:spcPts val="600"/>
+              </a:spcAft>
+            </a:pPr>
+            <a:r>
+              <a:rPr sz="1500">
+                <a:solidFill>
+                  <a:srgbClr val="22282E"/>
+                </a:solidFill>
+              </a:rPr>
+              <a:t>•  securityContext: ajustes de seguridad del pod/contenedor (runAsNonRoot, readOnlyRootFilesystem, drop capabilities). Clave: el equivalente al hardening de Docker en K8s.</a:t>
+            </a:r>
+          </a:p>
+          <a:p>
+            <a:pPr>
+              <a:spcAft>
+                <a:spcPts val="600"/>
+              </a:spcAft>
+            </a:pPr>
+            <a:r>
+              <a:rPr sz="1500">
+                <a:solidFill>
+                  <a:srgbClr val="22282E"/>
+                </a:solidFill>
+              </a:rPr>
+              <a:t>•  Escape de pod: obtener capacidades o acceso fuera del aislamiento previsto del contenedor. Clave: configuración privilegiada, mounts y vulnerabilidades pueden facilitarlo; el impacto debe demostrarse.</a:t>
+            </a:r>
+          </a:p>
+          <a:p>
+            <a:pPr>
+              <a:spcAft>
+                <a:spcPts val="600"/>
+              </a:spcAft>
+            </a:pPr>
+            <a:r>
+              <a:rPr sz="1500">
+                <a:solidFill>
+                  <a:srgbClr val="22282E"/>
+                </a:solidFill>
+              </a:rPr>
+              <a:t>•  RBAC escalate/bind: verbos para crear roles con permisos no poseídos o enlazar roles. Clave: son sensibles, pero su impacto depende de recursos, ámbitos y bindings disponibles.</a:t>
+            </a:r>
+          </a:p>
+          <a:p>
+            <a:pPr>
+              <a:spcAft>
+                <a:spcPts val="600"/>
+              </a:spcAft>
+            </a:pPr>
+            <a:r>
+              <a:rPr sz="1500">
+                <a:solidFill>
+                  <a:srgbClr val="22282E"/>
+                </a:solidFill>
+              </a:rPr>
+              <a:t>•  Token de ServiceAccount: JWT montado en el pod para hablar con la API. Clave: si se roba, el atacante actúa como ese SA.</a:t>
+            </a:r>
+          </a:p>
+          <a:p>
+            <a:pPr>
+              <a:spcAft>
+                <a:spcPts val="600"/>
+              </a:spcAft>
+            </a:pPr>
+            <a:r>
+              <a:rPr sz="1500">
+                <a:solidFill>
+                  <a:srgbClr val="22282E"/>
+                </a:solidFill>
+              </a:rPr>
+              <a:t>•  NetworkPolicy default-deny: conjunto de políticas que aísla Pods seleccionados en ingress y/o egress. Clave: establece allowlists si el CNI la implementa y las dependencias se modelan.</a:t>
+            </a:r>
+          </a:p>
+          <a:p>
+            <a:pPr>
+              <a:spcAft>
+                <a:spcPts val="600"/>
+              </a:spcAft>
+            </a:pPr>
+            <a:r>
+              <a:rPr sz="1500">
+                <a:solidFill>
+                  <a:srgbClr val="22282E"/>
+                </a:solidFill>
+              </a:rPr>
+              <a:t>•  kube-bench: herramienta que evalúa el CIS Benchmark. Clave: automatiza la auditoría de hardening.</a:t>
             </a:r>
           </a:p>
         </p:txBody>
@@ -4480,7 +5066,7 @@
                   <a:srgbClr val="0B3D2E"/>
                 </a:solidFill>
               </a:rPr>
-              <a:t>🧪 Laboratorio guiado</a:t>
+              <a:t>🔍 Caso razonado — `create pods` sin `get secrets`</a:t>
             </a:r>
           </a:p>
         </p:txBody>
@@ -4518,97 +5104,22 @@
                   <a:srgbClr val="22282E"/>
                 </a:solidFill>
               </a:rPr>
-              <a:t>•  Ejecuta kube-bench y anota los hallazgos del plano de control y de los nodos.</a:t>
-            </a:r>
-          </a:p>
-          <a:p>
-            <a:pPr>
-              <a:spcAft>
-                <a:spcPts val="600"/>
-              </a:spcAft>
-            </a:pPr>
-            <a:r>
-              <a:rPr sz="1500">
-                <a:solidFill>
-                  <a:srgbClr val="22282E"/>
-                </a:solidFill>
-              </a:rPr>
-              <a:t>•  Ataque — pod privilegiado: despliega un pod con securityContext.privileged: true y hostPID: true; desde él, accede al filesystem del nodo (nsenter/chroot al host). Comprueba el escape.</a:t>
-            </a:r>
-          </a:p>
-          <a:p>
-            <a:pPr>
-              <a:spcAft>
-                <a:spcPts val="600"/>
-              </a:spcAft>
-            </a:pPr>
-            <a:r>
-              <a:rPr sz="1500">
-                <a:solidFill>
-                  <a:srgbClr val="22282E"/>
-                </a:solidFill>
-              </a:rPr>
-              <a:t>•  Mitigación: activa Pod Security Admission en modo restricted en el namespace y vuelve a intentar desplegar el pod privilegiado; confirma que el admission lo rechaza.</a:t>
-            </a:r>
-          </a:p>
-          <a:p>
-            <a:pPr>
-              <a:spcAft>
-                <a:spcPts val="600"/>
-              </a:spcAft>
-            </a:pPr>
-            <a:r>
-              <a:rPr sz="1500">
-                <a:solidFill>
-                  <a:srgbClr val="22282E"/>
-                </a:solidFill>
-              </a:rPr>
-              <a:t>•  Ataque — RBAC: crea un Role con create pods y demuestra cómo, montando un pod con un ServiceAccount potente, se escala a más permisos.</a:t>
-            </a:r>
-          </a:p>
-          <a:p>
-            <a:pPr>
-              <a:spcAft>
-                <a:spcPts val="600"/>
-              </a:spcAft>
-            </a:pPr>
-            <a:r>
-              <a:rPr sz="1500">
-                <a:solidFill>
-                  <a:srgbClr val="22282E"/>
-                </a:solidFill>
-              </a:rPr>
-              <a:t>•  Mitigación: aplica privilegio mínimo, elimina verbos escalate/bind innecesarios y usa automountServiceAccountToken: false donde no se requiera.</a:t>
-            </a:r>
-          </a:p>
-          <a:p>
-            <a:pPr>
-              <a:spcAft>
-                <a:spcPts val="600"/>
-              </a:spcAft>
-            </a:pPr>
-            <a:r>
-              <a:rPr sz="1500">
-                <a:solidFill>
-                  <a:srgbClr val="22282E"/>
-                </a:solidFill>
-              </a:rPr>
-              <a:t>•  Ataque — red: demuestra que un pod comprometido alcanza a otros pods. Aplica una NetworkPolicy default-deny y permite solo el tráfico necesario; verifica el aislamiento.</a:t>
-            </a:r>
-          </a:p>
-          <a:p>
-            <a:pPr>
-              <a:spcAft>
-                <a:spcPts val="600"/>
-              </a:spcAft>
-            </a:pPr>
-            <a:r>
-              <a:rPr sz="1500">
-                <a:solidFill>
-                  <a:srgbClr val="22282E"/>
-                </a:solidFill>
-              </a:rPr>
-              <a:t>•  Endurece cada Deployment con securityContext (runAsNonRoot, readOnlyRootFilesystem, drop ALL capabilities) y reejecuta kube-bench/kubeaudit para confirmar la mejora.</a:t>
+              <a:t>•  Un desarrollador no puede leer Secrets por API, pero puede crear Pods y elegir cualquier ServiceAccount del namespace. Crea un Pod que monta un Secret usado por otra aplicación. La política parecía…</a:t>
+            </a:r>
+          </a:p>
+          <a:p>
+            <a:pPr>
+              <a:spcAft>
+                <a:spcPts val="600"/>
+              </a:spcAft>
+            </a:pPr>
+            <a:r>
+              <a:rPr sz="1500">
+                <a:solidFill>
+                  <a:srgbClr val="22282E"/>
+                </a:solidFill>
+              </a:rPr>
+              <a:t>•  La corrección separa namespaces por confianza, limita quién crea workloads, controla ServiceAccounts utilizables, aplica PSA Restricted y reduce Secrets montables por diseño. Una prueba negativa…</a:t>
             </a:r>
           </a:p>
         </p:txBody>
@@ -4659,7 +5170,7 @@
                   <a:srgbClr val="0B3D2E"/>
                 </a:solidFill>
               </a:rPr>
-              <a:t>✍️ Ejercicios</a:t>
+              <a:t>✅ Criterio de dominio</a:t>
             </a:r>
           </a:p>
         </p:txBody>
@@ -4697,82 +5208,7 @@
                   <a:srgbClr val="22282E"/>
                 </a:solidFill>
               </a:rPr>
-              <a:t>•  Escribe un securityContext que impida correr como root y monte el filesystem read-only.</a:t>
-            </a:r>
-          </a:p>
-          <a:p>
-            <a:pPr>
-              <a:spcAft>
-                <a:spcPts val="600"/>
-              </a:spcAft>
-            </a:pPr>
-            <a:r>
-              <a:rPr sz="1500">
-                <a:solidFill>
-                  <a:srgbClr val="22282E"/>
-                </a:solidFill>
-              </a:rPr>
-              <a:t>•  Convierte un namespace a Pod Security restricted y ajusta los pods que dejen de desplegar.</a:t>
-            </a:r>
-          </a:p>
-          <a:p>
-            <a:pPr>
-              <a:spcAft>
-                <a:spcPts val="600"/>
-              </a:spcAft>
-            </a:pPr>
-            <a:r>
-              <a:rPr sz="1500">
-                <a:solidFill>
-                  <a:srgbClr val="22282E"/>
-                </a:solidFill>
-              </a:rPr>
-              <a:t>•  Encuentra con kubeaudit todos los pods que permiten privilege escalation.</a:t>
-            </a:r>
-          </a:p>
-          <a:p>
-            <a:pPr>
-              <a:spcAft>
-                <a:spcPts val="600"/>
-              </a:spcAft>
-            </a:pPr>
-            <a:r>
-              <a:rPr sz="1500">
-                <a:solidFill>
-                  <a:srgbClr val="22282E"/>
-                </a:solidFill>
-              </a:rPr>
-              <a:t>•  Diseña una NetworkPolicy default-deny y una regla que permita solo el tráfico de una app a su base de datos.</a:t>
-            </a:r>
-          </a:p>
-          <a:p>
-            <a:pPr>
-              <a:spcAft>
-                <a:spcPts val="600"/>
-              </a:spcAft>
-            </a:pPr>
-            <a:r>
-              <a:rPr sz="1500">
-                <a:solidFill>
-                  <a:srgbClr val="22282E"/>
-                </a:solidFill>
-              </a:rPr>
-              <a:t>•  Identifica qué ClusterRoles otorgan  sobre  y propuestas de recorte.</a:t>
-            </a:r>
-          </a:p>
-          <a:p>
-            <a:pPr>
-              <a:spcAft>
-                <a:spcPts val="600"/>
-              </a:spcAft>
-            </a:pPr>
-            <a:r>
-              <a:rPr sz="1500">
-                <a:solidFill>
-                  <a:srgbClr val="22282E"/>
-                </a:solidFill>
-              </a:rPr>
-              <a:t>•  Documenta un escape de pod y la combinación exacta de controles que lo bloquea.</a:t>
+              <a:t>•  Dominas la clase cuando puedes convertir un hallazgo de benchmark en riesgo contextual, aplicar PSA con versión y modos, demostrar una ruta indirecta RBAC, construir NetworkPolicy desde flujos y…</a:t>
             </a:r>
           </a:p>
         </p:txBody>
@@ -4823,7 +5259,7 @@
                   <a:srgbClr val="0B3D2E"/>
                 </a:solidFill>
               </a:rPr>
-              <a:t>📝 Reto verificable</a:t>
+              <a:t>🧰 Herramientas y preparación</a:t>
             </a:r>
           </a:p>
         </p:txBody>
@@ -4861,67 +5297,37 @@
                   <a:srgbClr val="22282E"/>
                 </a:solidFill>
               </a:rPr>
-              <a:t>•  Parte de un clúster "por defecto" con un Deployment vulnerable y llévalo a un estado endurecido:</a:t>
-            </a:r>
-          </a:p>
-          <a:p>
-            <a:pPr>
-              <a:spcAft>
-                <a:spcPts val="600"/>
-              </a:spcAft>
-            </a:pPr>
-            <a:r>
-              <a:rPr sz="1500">
-                <a:solidFill>
-                  <a:srgbClr val="22282E"/>
-                </a:solidFill>
-              </a:rPr>
-              <a:t>•  PSA restricted, NetworkPolicy default-deny, RBAC mínimo y securityContext en todos los pods.</a:t>
-            </a:r>
-          </a:p>
-          <a:p>
-            <a:pPr>
-              <a:spcAft>
-                <a:spcPts val="600"/>
-              </a:spcAft>
-            </a:pPr>
-            <a:r>
-              <a:rPr sz="1500">
-                <a:solidFill>
-                  <a:srgbClr val="22282E"/>
-                </a:solidFill>
-              </a:rPr>
-              <a:t>•  Criterio de aceptación: el ataque de pod privilegiado del laboratorio ya no puede desplegarse</a:t>
-            </a:r>
-          </a:p>
-          <a:p>
-            <a:pPr>
-              <a:spcAft>
-                <a:spcPts val="600"/>
-              </a:spcAft>
-            </a:pPr>
-            <a:r>
-              <a:rPr sz="1500">
-                <a:solidFill>
-                  <a:srgbClr val="22282E"/>
-                </a:solidFill>
-              </a:rPr>
-              <a:t>•  (rechazado por PSA), kube-bench muestra los controles antes fallidos como PASS, y un pod</a:t>
-            </a:r>
-          </a:p>
-          <a:p>
-            <a:pPr>
-              <a:spcAft>
-                <a:spcPts val="600"/>
-              </a:spcAft>
-            </a:pPr>
-            <a:r>
-              <a:rPr sz="1500">
-                <a:solidFill>
-                  <a:srgbClr val="22282E"/>
-                </a:solidFill>
-              </a:rPr>
-              <a:t>•  comprometido ya no alcanza a otros pods por red.</a:t>
+              <a:t>•  Clúster de laboratorio (kind/minikube) sobre el que tengas control total.</a:t>
+            </a:r>
+          </a:p>
+          <a:p>
+            <a:pPr>
+              <a:spcAft>
+                <a:spcPts val="600"/>
+              </a:spcAft>
+            </a:pPr>
+            <a:r>
+              <a:rPr sz="1500">
+                <a:solidFill>
+                  <a:srgbClr val="22282E"/>
+                </a:solidFill>
+              </a:rPr>
+              <a:t>•  kube-bench, kubeaudit, kubescape, Trivy (modo k8s) y kubectl.</a:t>
+            </a:r>
+          </a:p>
+          <a:p>
+            <a:pPr>
+              <a:spcAft>
+                <a:spcPts val="600"/>
+              </a:spcAft>
+            </a:pPr>
+            <a:r>
+              <a:rPr sz="1500">
+                <a:solidFill>
+                  <a:srgbClr val="22282E"/>
+                </a:solidFill>
+              </a:rPr>
+              <a:t>•  Un CNI que soporte NetworkPolicy (p. ej. Calico) para las prácticas de red.</a:t>
             </a:r>
           </a:p>
         </p:txBody>
